--- a/ShakeStop-Gym-Pitch.pptx
+++ b/ShakeStop-Gym-Pitch.pptx
@@ -12540,7 +12540,7 @@
                 </a:solidFill>
                 <a:latin typeface="Segoe UI"/>
               </a:rPr>
-              <a:t>Let's run a 30-day pilot</a:t>
+              <a:t>Getting started is simple</a:t>
             </a:r>
           </a:p>
         </p:txBody>
@@ -12582,7 +12582,7 @@
                 </a:solidFill>
                 <a:latin typeface="Segoe UI"/>
               </a:rPr>
-              <a:t>Simple, fast, and risk-free — see the results before committing.</a:t>
+              <a:t>A smooth, low-effort setup — we handle the heavy lifting.</a:t>
             </a:r>
           </a:p>
         </p:txBody>
@@ -13438,7 +13438,7 @@
                 </a:solidFill>
                 <a:latin typeface="Segoe UI"/>
               </a:rPr>
-              <a:t>After 30 days, review sales together &amp; scale up.</a:t>
+              <a:t>Gather feedback and enhance the menu &amp; experience.</a:t>
             </a:r>
           </a:p>
         </p:txBody>
